--- a/presentations/10-c-structs-and-tiles/10-c-structs-and-tiles-lecture.pptx
+++ b/presentations/10-c-structs-and-tiles/10-c-structs-and-tiles-lecture.pptx
@@ -138,7 +138,7 @@
   <p:extLst>
     <p:ext uri="{521415D9-36F7-43E2-AB2F-B90AF26B5E84}">
       <p14:sectionLst xmlns:p14="http://schemas.microsoft.com/office/powerpoint/2010/main">
-        <p14:section name="Opening" id="{b6ff929f-62ed-6301-406d-6af7d5dd4729}">
+        <p14:section name="Opening" id="{8ac039b3-c391-62b3-c090-e7d8915ca79b}">
           <p14:sldIdLst>
             <p14:sldId id="256"/>
             <p14:sldId id="257"/>
@@ -146,7 +146,7 @@
             <p14:sldId id="259"/>
           </p14:sldIdLst>
         </p14:section>
-        <p14:section name="Arrays" id="{64339f64-fd4a-d5b5-6f66-853786f0c4b6}">
+        <p14:section name="Arrays" id="{8b116077-d2b0-afdd-7306-dfafe91fdb26}">
           <p14:sldIdLst>
             <p14:sldId id="260"/>
             <p14:sldId id="261"/>
@@ -157,7 +157,7 @@
             <p14:sldId id="266"/>
           </p14:sldIdLst>
         </p14:section>
-        <p14:section name="Structs" id="{e11751de-4991-7e8a-10cc-9d8ecf9eb404}">
+        <p14:section name="Structs" id="{034b5746-dab3-8309-3eb6-6d1188cf2562}">
           <p14:sldIdLst>
             <p14:sldId id="267"/>
             <p14:sldId id="268"/>
@@ -167,7 +167,7 @@
             <p14:sldId id="272"/>
           </p14:sldIdLst>
         </p14:section>
-        <p14:section name="Tile maps" id="{4f1dd872-222a-ea9a-b9b9-8ebd8a746111}">
+        <p14:section name="Tile maps" id="{1cfa4de5-aa26-197f-5b89-750c4cd730a0}">
           <p14:sldIdLst>
             <p14:sldId id="273"/>
             <p14:sldId id="274"/>
@@ -178,7 +178,7 @@
             <p14:sldId id="279"/>
           </p14:sldIdLst>
         </p14:section>
-        <p14:section name="Behaviour" id="{67a75a1c-e9f5-6fcf-6545-e545052f5d0e}">
+        <p14:section name="Behaviour" id="{a09a0741-381b-c1a7-64b2-045644fb485b}">
           <p14:sldIdLst>
             <p14:sldId id="280"/>
             <p14:sldId id="281"/>
@@ -189,7 +189,7 @@
             <p14:sldId id="286"/>
           </p14:sldIdLst>
         </p14:section>
-        <p14:section name="Closing" id="{c6f6a462-d232-921d-ca3f-913ee75a1cc3}">
+        <p14:section name="Closing" id="{85ee3495-9590-7f8d-421c-23872b28dd5d}">
           <p14:sldIdLst>
             <p14:sldId id="287"/>
           </p14:sldIdLst>
@@ -7737,7 +7737,7 @@
               <a:buNone/>
             </a:pPr>
             <a:r>
-              <a:rPr lang="en-US" sz="1022" dirty="0">
+              <a:rPr lang="en-US" sz="1398" dirty="0">
                 <a:solidFill>
                   <a:srgbClr val="5B6B78"/>
                 </a:solidFill>
@@ -7747,7 +7747,7 @@
               </a:rPr>
               <a:t>+0</a:t>
             </a:r>
-            <a:endParaRPr lang="en-US" sz="1022" dirty="0"/>
+            <a:endParaRPr lang="en-US" sz="1398" dirty="0"/>
           </a:p>
         </p:txBody>
       </p:sp>
@@ -7782,7 +7782,7 @@
               <a:buNone/>
             </a:pPr>
             <a:r>
-              <a:rPr lang="en-US" sz="1222" b="1" dirty="0">
+              <a:rPr lang="en-US" sz="1598" b="1" dirty="0">
                 <a:solidFill>
                   <a:srgbClr val="FFFFFF"/>
                 </a:solidFill>
@@ -7792,7 +7792,7 @@
               </a:rPr>
               <a:t>x</a:t>
             </a:r>
-            <a:endParaRPr lang="en-US" sz="1222" dirty="0"/>
+            <a:endParaRPr lang="en-US" sz="1598" dirty="0"/>
           </a:p>
         </p:txBody>
       </p:sp>
@@ -7821,7 +7821,7 @@
               <a:buNone/>
             </a:pPr>
             <a:r>
-              <a:rPr lang="en-US" sz="1022" dirty="0">
+              <a:rPr lang="en-US" sz="1398" dirty="0">
                 <a:solidFill>
                   <a:srgbClr val="5B6B78"/>
                 </a:solidFill>
@@ -7831,7 +7831,7 @@
               </a:rPr>
               <a:t>4 bytes</a:t>
             </a:r>
-            <a:endParaRPr lang="en-US" sz="1022" dirty="0"/>
+            <a:endParaRPr lang="en-US" sz="1398" dirty="0"/>
           </a:p>
         </p:txBody>
       </p:sp>
@@ -7860,7 +7860,7 @@
               <a:buNone/>
             </a:pPr>
             <a:r>
-              <a:rPr lang="en-US" sz="1222" dirty="0">
+              <a:rPr lang="en-US" sz="1598" dirty="0">
                 <a:solidFill>
                   <a:srgbClr val="1B2530"/>
                 </a:solidFill>
@@ -7870,7 +7870,7 @@
               </a:rPr>
               <a:t>int</a:t>
             </a:r>
-            <a:endParaRPr lang="en-US" sz="1222" dirty="0"/>
+            <a:endParaRPr lang="en-US" sz="1598" dirty="0"/>
           </a:p>
         </p:txBody>
       </p:sp>
@@ -7899,7 +7899,7 @@
               <a:buNone/>
             </a:pPr>
             <a:r>
-              <a:rPr lang="en-US" sz="1022" dirty="0">
+              <a:rPr lang="en-US" sz="1398" dirty="0">
                 <a:solidFill>
                   <a:srgbClr val="5B6B78"/>
                 </a:solidFill>
@@ -7909,7 +7909,7 @@
               </a:rPr>
               <a:t>+4</a:t>
             </a:r>
-            <a:endParaRPr lang="en-US" sz="1022" dirty="0"/>
+            <a:endParaRPr lang="en-US" sz="1398" dirty="0"/>
           </a:p>
         </p:txBody>
       </p:sp>
@@ -7944,7 +7944,7 @@
               <a:buNone/>
             </a:pPr>
             <a:r>
-              <a:rPr lang="en-US" sz="1222" b="1" dirty="0">
+              <a:rPr lang="en-US" sz="1598" b="1" dirty="0">
                 <a:solidFill>
                   <a:srgbClr val="FFFFFF"/>
                 </a:solidFill>
@@ -7954,7 +7954,7 @@
               </a:rPr>
               <a:t>y</a:t>
             </a:r>
-            <a:endParaRPr lang="en-US" sz="1222" dirty="0"/>
+            <a:endParaRPr lang="en-US" sz="1598" dirty="0"/>
           </a:p>
         </p:txBody>
       </p:sp>
@@ -7983,7 +7983,7 @@
               <a:buNone/>
             </a:pPr>
             <a:r>
-              <a:rPr lang="en-US" sz="1022" dirty="0">
+              <a:rPr lang="en-US" sz="1398" dirty="0">
                 <a:solidFill>
                   <a:srgbClr val="5B6B78"/>
                 </a:solidFill>
@@ -7993,7 +7993,7 @@
               </a:rPr>
               <a:t>4 bytes</a:t>
             </a:r>
-            <a:endParaRPr lang="en-US" sz="1022" dirty="0"/>
+            <a:endParaRPr lang="en-US" sz="1398" dirty="0"/>
           </a:p>
         </p:txBody>
       </p:sp>
@@ -8022,7 +8022,7 @@
               <a:buNone/>
             </a:pPr>
             <a:r>
-              <a:rPr lang="en-US" sz="1222" dirty="0">
+              <a:rPr lang="en-US" sz="1598" dirty="0">
                 <a:solidFill>
                   <a:srgbClr val="1B2530"/>
                 </a:solidFill>
@@ -8032,7 +8032,7 @@
               </a:rPr>
               <a:t>int</a:t>
             </a:r>
-            <a:endParaRPr lang="en-US" sz="1222" dirty="0"/>
+            <a:endParaRPr lang="en-US" sz="1598" dirty="0"/>
           </a:p>
         </p:txBody>
       </p:sp>
@@ -8061,7 +8061,7 @@
               <a:buNone/>
             </a:pPr>
             <a:r>
-              <a:rPr lang="en-US" sz="1022" dirty="0">
+              <a:rPr lang="en-US" sz="1398" dirty="0">
                 <a:solidFill>
                   <a:srgbClr val="5B6B78"/>
                 </a:solidFill>
@@ -8071,7 +8071,7 @@
               </a:rPr>
               <a:t>+8</a:t>
             </a:r>
-            <a:endParaRPr lang="en-US" sz="1022" dirty="0"/>
+            <a:endParaRPr lang="en-US" sz="1398" dirty="0"/>
           </a:p>
         </p:txBody>
       </p:sp>
@@ -8106,7 +8106,7 @@
               <a:buNone/>
             </a:pPr>
             <a:r>
-              <a:rPr lang="en-US" sz="1222" b="1" dirty="0">
+              <a:rPr lang="en-US" sz="1598" b="1" dirty="0">
                 <a:solidFill>
                   <a:srgbClr val="FFFFFF"/>
                 </a:solidFill>
@@ -8116,7 +8116,7 @@
               </a:rPr>
               <a:t>vx</a:t>
             </a:r>
-            <a:endParaRPr lang="en-US" sz="1222" dirty="0"/>
+            <a:endParaRPr lang="en-US" sz="1598" dirty="0"/>
           </a:p>
         </p:txBody>
       </p:sp>
@@ -8145,7 +8145,7 @@
               <a:buNone/>
             </a:pPr>
             <a:r>
-              <a:rPr lang="en-US" sz="1022" dirty="0">
+              <a:rPr lang="en-US" sz="1398" dirty="0">
                 <a:solidFill>
                   <a:srgbClr val="5B6B78"/>
                 </a:solidFill>
@@ -8155,7 +8155,7 @@
               </a:rPr>
               <a:t>4 bytes</a:t>
             </a:r>
-            <a:endParaRPr lang="en-US" sz="1022" dirty="0"/>
+            <a:endParaRPr lang="en-US" sz="1398" dirty="0"/>
           </a:p>
         </p:txBody>
       </p:sp>
@@ -8184,7 +8184,7 @@
               <a:buNone/>
             </a:pPr>
             <a:r>
-              <a:rPr lang="en-US" sz="1222" dirty="0">
+              <a:rPr lang="en-US" sz="1598" dirty="0">
                 <a:solidFill>
                   <a:srgbClr val="1B2530"/>
                 </a:solidFill>
@@ -8194,7 +8194,7 @@
               </a:rPr>
               <a:t>int</a:t>
             </a:r>
-            <a:endParaRPr lang="en-US" sz="1222" dirty="0"/>
+            <a:endParaRPr lang="en-US" sz="1598" dirty="0"/>
           </a:p>
         </p:txBody>
       </p:sp>
@@ -8223,7 +8223,7 @@
               <a:buNone/>
             </a:pPr>
             <a:r>
-              <a:rPr lang="en-US" sz="1022" dirty="0">
+              <a:rPr lang="en-US" sz="1398" dirty="0">
                 <a:solidFill>
                   <a:srgbClr val="5B6B78"/>
                 </a:solidFill>
@@ -8233,7 +8233,7 @@
               </a:rPr>
               <a:t>+12</a:t>
             </a:r>
-            <a:endParaRPr lang="en-US" sz="1022" dirty="0"/>
+            <a:endParaRPr lang="en-US" sz="1398" dirty="0"/>
           </a:p>
         </p:txBody>
       </p:sp>
@@ -8268,7 +8268,7 @@
               <a:buNone/>
             </a:pPr>
             <a:r>
-              <a:rPr lang="en-US" sz="1222" b="1" dirty="0">
+              <a:rPr lang="en-US" sz="1598" b="1" dirty="0">
                 <a:solidFill>
                   <a:srgbClr val="FFFFFF"/>
                 </a:solidFill>
@@ -8278,7 +8278,7 @@
               </a:rPr>
               <a:t>vy</a:t>
             </a:r>
-            <a:endParaRPr lang="en-US" sz="1222" dirty="0"/>
+            <a:endParaRPr lang="en-US" sz="1598" dirty="0"/>
           </a:p>
         </p:txBody>
       </p:sp>
@@ -8307,7 +8307,7 @@
               <a:buNone/>
             </a:pPr>
             <a:r>
-              <a:rPr lang="en-US" sz="1022" dirty="0">
+              <a:rPr lang="en-US" sz="1398" dirty="0">
                 <a:solidFill>
                   <a:srgbClr val="5B6B78"/>
                 </a:solidFill>
@@ -8317,7 +8317,7 @@
               </a:rPr>
               <a:t>4 bytes</a:t>
             </a:r>
-            <a:endParaRPr lang="en-US" sz="1022" dirty="0"/>
+            <a:endParaRPr lang="en-US" sz="1398" dirty="0"/>
           </a:p>
         </p:txBody>
       </p:sp>
@@ -8346,7 +8346,7 @@
               <a:buNone/>
             </a:pPr>
             <a:r>
-              <a:rPr lang="en-US" sz="1222" dirty="0">
+              <a:rPr lang="en-US" sz="1598" dirty="0">
                 <a:solidFill>
                   <a:srgbClr val="1B2530"/>
                 </a:solidFill>
@@ -8356,7 +8356,7 @@
               </a:rPr>
               <a:t>int</a:t>
             </a:r>
-            <a:endParaRPr lang="en-US" sz="1222" dirty="0"/>
+            <a:endParaRPr lang="en-US" sz="1598" dirty="0"/>
           </a:p>
         </p:txBody>
       </p:sp>
@@ -8385,7 +8385,7 @@
               <a:buNone/>
             </a:pPr>
             <a:r>
-              <a:rPr lang="en-US" sz="1022" dirty="0">
+              <a:rPr lang="en-US" sz="1398" dirty="0">
                 <a:solidFill>
                   <a:srgbClr val="5B6B78"/>
                 </a:solidFill>
@@ -8395,7 +8395,7 @@
               </a:rPr>
               <a:t>+16</a:t>
             </a:r>
-            <a:endParaRPr lang="en-US" sz="1022" dirty="0"/>
+            <a:endParaRPr lang="en-US" sz="1398" dirty="0"/>
           </a:p>
         </p:txBody>
       </p:sp>
@@ -8430,7 +8430,7 @@
               <a:buNone/>
             </a:pPr>
             <a:r>
-              <a:rPr lang="en-US" sz="1222" b="1" dirty="0">
+              <a:rPr lang="en-US" sz="1598" b="1" dirty="0">
                 <a:solidFill>
                   <a:srgbClr val="FFFFFF"/>
                 </a:solidFill>
@@ -8440,7 +8440,7 @@
               </a:rPr>
               <a:t>w</a:t>
             </a:r>
-            <a:endParaRPr lang="en-US" sz="1222" dirty="0"/>
+            <a:endParaRPr lang="en-US" sz="1598" dirty="0"/>
           </a:p>
         </p:txBody>
       </p:sp>
@@ -8469,7 +8469,7 @@
               <a:buNone/>
             </a:pPr>
             <a:r>
-              <a:rPr lang="en-US" sz="1022" dirty="0">
+              <a:rPr lang="en-US" sz="1398" dirty="0">
                 <a:solidFill>
                   <a:srgbClr val="5B6B78"/>
                 </a:solidFill>
@@ -8479,7 +8479,7 @@
               </a:rPr>
               <a:t>2 bytes</a:t>
             </a:r>
-            <a:endParaRPr lang="en-US" sz="1022" dirty="0"/>
+            <a:endParaRPr lang="en-US" sz="1398" dirty="0"/>
           </a:p>
         </p:txBody>
       </p:sp>
@@ -8508,7 +8508,7 @@
               <a:buNone/>
             </a:pPr>
             <a:r>
-              <a:rPr lang="en-US" sz="1222" dirty="0">
+              <a:rPr lang="en-US" sz="1598" dirty="0">
                 <a:solidFill>
                   <a:srgbClr val="1B2530"/>
                 </a:solidFill>
@@ -8518,7 +8518,7 @@
               </a:rPr>
               <a:t>uint16_t</a:t>
             </a:r>
-            <a:endParaRPr lang="en-US" sz="1222" dirty="0"/>
+            <a:endParaRPr lang="en-US" sz="1598" dirty="0"/>
           </a:p>
         </p:txBody>
       </p:sp>
@@ -8547,7 +8547,7 @@
               <a:buNone/>
             </a:pPr>
             <a:r>
-              <a:rPr lang="en-US" sz="1022" dirty="0">
+              <a:rPr lang="en-US" sz="1398" dirty="0">
                 <a:solidFill>
                   <a:srgbClr val="5B6B78"/>
                 </a:solidFill>
@@ -8557,7 +8557,7 @@
               </a:rPr>
               <a:t>+18</a:t>
             </a:r>
-            <a:endParaRPr lang="en-US" sz="1022" dirty="0"/>
+            <a:endParaRPr lang="en-US" sz="1398" dirty="0"/>
           </a:p>
         </p:txBody>
       </p:sp>
@@ -8592,7 +8592,7 @@
               <a:buNone/>
             </a:pPr>
             <a:r>
-              <a:rPr lang="en-US" sz="1222" b="1" dirty="0">
+              <a:rPr lang="en-US" sz="1598" b="1" dirty="0">
                 <a:solidFill>
                   <a:srgbClr val="FFFFFF"/>
                 </a:solidFill>
@@ -8602,7 +8602,7 @@
               </a:rPr>
               <a:t>h</a:t>
             </a:r>
-            <a:endParaRPr lang="en-US" sz="1222" dirty="0"/>
+            <a:endParaRPr lang="en-US" sz="1598" dirty="0"/>
           </a:p>
         </p:txBody>
       </p:sp>
@@ -8631,7 +8631,7 @@
               <a:buNone/>
             </a:pPr>
             <a:r>
-              <a:rPr lang="en-US" sz="1022" dirty="0">
+              <a:rPr lang="en-US" sz="1398" dirty="0">
                 <a:solidFill>
                   <a:srgbClr val="5B6B78"/>
                 </a:solidFill>
@@ -8641,7 +8641,7 @@
               </a:rPr>
               <a:t>2 bytes</a:t>
             </a:r>
-            <a:endParaRPr lang="en-US" sz="1022" dirty="0"/>
+            <a:endParaRPr lang="en-US" sz="1398" dirty="0"/>
           </a:p>
         </p:txBody>
       </p:sp>
@@ -8670,7 +8670,7 @@
               <a:buNone/>
             </a:pPr>
             <a:r>
-              <a:rPr lang="en-US" sz="1222" dirty="0">
+              <a:rPr lang="en-US" sz="1598" dirty="0">
                 <a:solidFill>
                   <a:srgbClr val="1B2530"/>
                 </a:solidFill>
@@ -8680,7 +8680,7 @@
               </a:rPr>
               <a:t>uint16_t</a:t>
             </a:r>
-            <a:endParaRPr lang="en-US" sz="1222" dirty="0"/>
+            <a:endParaRPr lang="en-US" sz="1598" dirty="0"/>
           </a:p>
         </p:txBody>
       </p:sp>
@@ -8709,7 +8709,7 @@
               <a:buNone/>
             </a:pPr>
             <a:r>
-              <a:rPr lang="en-US" sz="1022" dirty="0">
+              <a:rPr lang="en-US" sz="1398" dirty="0">
                 <a:solidFill>
                   <a:srgbClr val="5B6B78"/>
                 </a:solidFill>
@@ -8719,7 +8719,7 @@
               </a:rPr>
               <a:t>+20</a:t>
             </a:r>
-            <a:endParaRPr lang="en-US" sz="1022" dirty="0"/>
+            <a:endParaRPr lang="en-US" sz="1398" dirty="0"/>
           </a:p>
         </p:txBody>
       </p:sp>
@@ -8754,7 +8754,7 @@
               <a:buNone/>
             </a:pPr>
             <a:r>
-              <a:rPr lang="en-US" sz="1222" b="1" dirty="0">
+              <a:rPr lang="en-US" sz="1598" b="1" dirty="0">
                 <a:solidFill>
                   <a:srgbClr val="FFFFFF"/>
                 </a:solidFill>
@@ -8764,7 +8764,7 @@
               </a:rPr>
               <a:t>state</a:t>
             </a:r>
-            <a:endParaRPr lang="en-US" sz="1222" dirty="0"/>
+            <a:endParaRPr lang="en-US" sz="1598" dirty="0"/>
           </a:p>
         </p:txBody>
       </p:sp>
@@ -8793,7 +8793,7 @@
               <a:buNone/>
             </a:pPr>
             <a:r>
-              <a:rPr lang="en-US" sz="1022" dirty="0">
+              <a:rPr lang="en-US" sz="1398" dirty="0">
                 <a:solidFill>
                   <a:srgbClr val="5B6B78"/>
                 </a:solidFill>
@@ -8803,7 +8803,7 @@
               </a:rPr>
               <a:t>2 bytes</a:t>
             </a:r>
-            <a:endParaRPr lang="en-US" sz="1022" dirty="0"/>
+            <a:endParaRPr lang="en-US" sz="1398" dirty="0"/>
           </a:p>
         </p:txBody>
       </p:sp>
@@ -8832,7 +8832,7 @@
               <a:buNone/>
             </a:pPr>
             <a:r>
-              <a:rPr lang="en-US" sz="1222" dirty="0">
+              <a:rPr lang="en-US" sz="1598" dirty="0">
                 <a:solidFill>
                   <a:srgbClr val="1B2530"/>
                 </a:solidFill>
@@ -8842,7 +8842,7 @@
               </a:rPr>
               <a:t>uint16_t</a:t>
             </a:r>
-            <a:endParaRPr lang="en-US" sz="1222" dirty="0"/>
+            <a:endParaRPr lang="en-US" sz="1598" dirty="0"/>
           </a:p>
         </p:txBody>
       </p:sp>
@@ -8871,7 +8871,7 @@
               <a:buNone/>
             </a:pPr>
             <a:r>
-              <a:rPr lang="en-US" sz="1022" dirty="0">
+              <a:rPr lang="en-US" sz="1398" dirty="0">
                 <a:solidFill>
                   <a:srgbClr val="5B6B78"/>
                 </a:solidFill>
@@ -8881,7 +8881,7 @@
               </a:rPr>
               <a:t>+22</a:t>
             </a:r>
-            <a:endParaRPr lang="en-US" sz="1022" dirty="0"/>
+            <a:endParaRPr lang="en-US" sz="1398" dirty="0"/>
           </a:p>
         </p:txBody>
       </p:sp>
@@ -8916,7 +8916,7 @@
               <a:buNone/>
             </a:pPr>
             <a:r>
-              <a:rPr lang="en-US" sz="1222" b="1" dirty="0">
+              <a:rPr lang="en-US" sz="1598" b="1" dirty="0">
                 <a:solidFill>
                   <a:srgbClr val="FFFFFF"/>
                 </a:solidFill>
@@ -8926,7 +8926,7 @@
               </a:rPr>
               <a:t>layer, reserved</a:t>
             </a:r>
-            <a:endParaRPr lang="en-US" sz="1222" dirty="0"/>
+            <a:endParaRPr lang="en-US" sz="1598" dirty="0"/>
           </a:p>
         </p:txBody>
       </p:sp>
@@ -8955,7 +8955,7 @@
               <a:buNone/>
             </a:pPr>
             <a:r>
-              <a:rPr lang="en-US" sz="1022" dirty="0">
+              <a:rPr lang="en-US" sz="1398" dirty="0">
                 <a:solidFill>
                   <a:srgbClr val="5B6B78"/>
                 </a:solidFill>
@@ -8965,7 +8965,7 @@
               </a:rPr>
               <a:t>2 bytes</a:t>
             </a:r>
-            <a:endParaRPr lang="en-US" sz="1022" dirty="0"/>
+            <a:endParaRPr lang="en-US" sz="1398" dirty="0"/>
           </a:p>
         </p:txBody>
       </p:sp>
@@ -8994,7 +8994,7 @@
               <a:buNone/>
             </a:pPr>
             <a:r>
-              <a:rPr lang="en-US" sz="1222" dirty="0">
+              <a:rPr lang="en-US" sz="1598" dirty="0">
                 <a:solidFill>
                   <a:srgbClr val="1B2530"/>
                 </a:solidFill>
@@ -9004,7 +9004,7 @@
               </a:rPr>
               <a:t>uint8_t each</a:t>
             </a:r>
-            <a:endParaRPr lang="en-US" sz="1222" dirty="0"/>
+            <a:endParaRPr lang="en-US" sz="1598" dirty="0"/>
           </a:p>
         </p:txBody>
       </p:sp>
@@ -15387,7 +15387,7 @@
               <a:buNone/>
             </a:pPr>
             <a:r>
-              <a:rPr lang="en-US" sz="1100" dirty="0">
+              <a:rPr lang="en-US" sz="1250" dirty="0">
                 <a:solidFill>
                   <a:srgbClr val="E6EDF2"/>
                 </a:solidFill>
@@ -15401,7 +15401,7 @@
               <a:buNone/>
             </a:pPr>
             <a:r>
-              <a:rPr lang="en-US" sz="1100" dirty="0">
+              <a:rPr lang="en-US" sz="1250" dirty="0">
                 <a:solidFill>
                   <a:srgbClr val="8FB3A0"/>
                 </a:solidFill>
@@ -15409,16 +15409,16 @@
                 <a:ea typeface="Courier New" pitchFamily="34" charset="-122"/>
                 <a:cs typeface="Courier New" pitchFamily="34" charset="-120"/>
               </a:rPr>
-              <a:t>/* ground is solid */</a:t>
-            </a:r>
-            <a:endParaRPr lang="en-US" sz="1100" dirty="0"/>
+              <a:t>/* ground is</a:t>
+            </a:r>
+            <a:endParaRPr lang="en-US" sz="1250" dirty="0"/>
           </a:p>
           <a:p>
             <a:pPr indent="0" marL="0">
               <a:buNone/>
             </a:pPr>
             <a:r>
-              <a:rPr lang="en-US" sz="1100" dirty="0">
+              <a:rPr lang="en-US" sz="1250" dirty="0">
                 <a:solidFill>
                   <a:srgbClr val="E6EDF2"/>
                 </a:solidFill>
@@ -15426,54 +15426,105 @@
                 <a:ea typeface="Courier New" pitchFamily="34" charset="-122"/>
                 <a:cs typeface="Courier New" pitchFamily="34" charset="-120"/>
               </a:rPr>
-              <a:t>prg32_platform_tile_flags(5, PRG32_TILE_FLAG_HAZARD);   </a:t>
-            </a:r>
+              <a:t>    solid */</a:t>
+            </a:r>
+            <a:endParaRPr lang="en-US" sz="1250" dirty="0"/>
+          </a:p>
+          <a:p>
             <a:pPr indent="0" marL="0">
               <a:buNone/>
             </a:pPr>
             <a:r>
-              <a:rPr lang="en-US" sz="1100" dirty="0">
-                <a:solidFill>
-                  <a:srgbClr val="8FB3A0"/>
+              <a:rPr lang="en-US" sz="1250" dirty="0">
+                <a:solidFill>
+                  <a:srgbClr val="E6EDF2"/>
                 </a:solidFill>
                 <a:latin typeface="Courier New" pitchFamily="34" charset="0"/>
                 <a:ea typeface="Courier New" pitchFamily="34" charset="-122"/>
                 <a:cs typeface="Courier New" pitchFamily="34" charset="-120"/>
               </a:rPr>
-              <a:t>/* spikes hurt */</a:t>
-            </a:r>
-            <a:endParaRPr lang="en-US" sz="1100" dirty="0"/>
-          </a:p>
-          <a:p>
+              <a:t>prg32_platform_tile_flags(5, PRG32_TILE_FLAG_HAZARD);   </a:t>
+            </a:r>
             <a:pPr indent="0" marL="0">
               <a:buNone/>
             </a:pPr>
             <a:r>
-              <a:rPr lang="en-US" sz="1100" dirty="0">
-                <a:solidFill>
-                  <a:srgbClr val="E6EDF2"/>
+              <a:rPr lang="en-US" sz="1250" dirty="0">
+                <a:solidFill>
+                  <a:srgbClr val="8FB3A0"/>
                 </a:solidFill>
                 <a:latin typeface="Courier New" pitchFamily="34" charset="0"/>
                 <a:ea typeface="Courier New" pitchFamily="34" charset="-122"/>
                 <a:cs typeface="Courier New" pitchFamily="34" charset="-120"/>
               </a:rPr>
-              <a:t>prg32_platform_tile_flags(6, PRG32_TILE_FLAG_COLLECT);  </a:t>
-            </a:r>
+              <a:t>/* spikes</a:t>
+            </a:r>
+            <a:endParaRPr lang="en-US" sz="1250" dirty="0"/>
+          </a:p>
+          <a:p>
             <a:pPr indent="0" marL="0">
               <a:buNone/>
             </a:pPr>
             <a:r>
-              <a:rPr lang="en-US" sz="1100" dirty="0">
-                <a:solidFill>
-                  <a:srgbClr val="8FB3A0"/>
+              <a:rPr lang="en-US" sz="1250" dirty="0">
+                <a:solidFill>
+                  <a:srgbClr val="E6EDF2"/>
                 </a:solidFill>
                 <a:latin typeface="Courier New" pitchFamily="34" charset="0"/>
                 <a:ea typeface="Courier New" pitchFamily="34" charset="-122"/>
                 <a:cs typeface="Courier New" pitchFamily="34" charset="-120"/>
               </a:rPr>
-              <a:t>/* coins collect */</a:t>
-            </a:r>
-            <a:endParaRPr lang="en-US" sz="1100" dirty="0"/>
+              <a:t>    hurt */</a:t>
+            </a:r>
+            <a:endParaRPr lang="en-US" sz="1250" dirty="0"/>
+          </a:p>
+          <a:p>
+            <a:pPr indent="0" marL="0">
+              <a:buNone/>
+            </a:pPr>
+            <a:r>
+              <a:rPr lang="en-US" sz="1250" dirty="0">
+                <a:solidFill>
+                  <a:srgbClr val="E6EDF2"/>
+                </a:solidFill>
+                <a:latin typeface="Courier New" pitchFamily="34" charset="0"/>
+                <a:ea typeface="Courier New" pitchFamily="34" charset="-122"/>
+                <a:cs typeface="Courier New" pitchFamily="34" charset="-120"/>
+              </a:rPr>
+              <a:t>prg32_platform_tile_flags(6, PRG32_TILE_FLAG_COLLECT);  </a:t>
+            </a:r>
+            <a:pPr indent="0" marL="0">
+              <a:buNone/>
+            </a:pPr>
+            <a:r>
+              <a:rPr lang="en-US" sz="1250" dirty="0">
+                <a:solidFill>
+                  <a:srgbClr val="8FB3A0"/>
+                </a:solidFill>
+                <a:latin typeface="Courier New" pitchFamily="34" charset="0"/>
+                <a:ea typeface="Courier New" pitchFamily="34" charset="-122"/>
+                <a:cs typeface="Courier New" pitchFamily="34" charset="-120"/>
+              </a:rPr>
+              <a:t>/* coins</a:t>
+            </a:r>
+            <a:endParaRPr lang="en-US" sz="1250" dirty="0"/>
+          </a:p>
+          <a:p>
+            <a:pPr indent="0" marL="0">
+              <a:buNone/>
+            </a:pPr>
+            <a:r>
+              <a:rPr lang="en-US" sz="1250" dirty="0">
+                <a:solidFill>
+                  <a:srgbClr val="E6EDF2"/>
+                </a:solidFill>
+                <a:latin typeface="Courier New" pitchFamily="34" charset="0"/>
+                <a:ea typeface="Courier New" pitchFamily="34" charset="-122"/>
+                <a:cs typeface="Courier New" pitchFamily="34" charset="-120"/>
+              </a:rPr>
+              <a:t>    collect */</a:t>
+            </a:r>
+            <a:endParaRPr lang="en-US" sz="1250" dirty="0"/>
           </a:p>
         </p:txBody>
       </p:sp>
@@ -17270,7 +17321,7 @@
               <a:buNone/>
             </a:pPr>
             <a:r>
-              <a:rPr lang="en-US" sz="1100" dirty="0">
+              <a:rPr lang="en-US" sz="1250" dirty="0">
                 <a:solidFill>
                   <a:srgbClr val="E6EDF2"/>
                 </a:solidFill>
@@ -17280,14 +17331,14 @@
               </a:rPr>
               <a:t>static prg32_platform_actor_t player;</a:t>
             </a:r>
-            <a:endParaRPr lang="en-US" sz="1100" dirty="0"/>
+            <a:endParaRPr lang="en-US" sz="1250" dirty="0"/>
           </a:p>
           <a:p>
             <a:pPr indent="0" marL="0">
               <a:buNone/>
             </a:pPr>
             <a:r>
-              <a:rPr lang="en-US" sz="1100" dirty="0">
+              <a:rPr lang="en-US" sz="1250" dirty="0">
                 <a:solidFill>
                   <a:srgbClr val="E6EDF2"/>
                 </a:solidFill>
@@ -17297,14 +17348,14 @@
               </a:rPr>
               <a:t> </a:t>
             </a:r>
-            <a:endParaRPr lang="en-US" sz="1100" dirty="0"/>
+            <a:endParaRPr lang="en-US" sz="1250" dirty="0"/>
           </a:p>
           <a:p>
             <a:pPr indent="0" marL="0">
               <a:buNone/>
             </a:pPr>
             <a:r>
-              <a:rPr lang="en-US" sz="1100" dirty="0">
+              <a:rPr lang="en-US" sz="1250" dirty="0">
                 <a:solidFill>
                   <a:srgbClr val="E6EDF2"/>
                 </a:solidFill>
@@ -17314,14 +17365,14 @@
               </a:rPr>
               <a:t>void platformer_c_init(void) {</a:t>
             </a:r>
-            <a:endParaRPr lang="en-US" sz="1100" dirty="0"/>
+            <a:endParaRPr lang="en-US" sz="1250" dirty="0"/>
           </a:p>
           <a:p>
             <a:pPr indent="0" marL="0">
               <a:buNone/>
             </a:pPr>
             <a:r>
-              <a:rPr lang="en-US" sz="1100" dirty="0">
+              <a:rPr lang="en-US" sz="1250" dirty="0">
                 <a:solidFill>
                   <a:srgbClr val="E6EDF2"/>
                 </a:solidFill>
@@ -17335,7 +17386,7 @@
               <a:buNone/>
             </a:pPr>
             <a:r>
-              <a:rPr lang="en-US" sz="1100" dirty="0">
+              <a:rPr lang="en-US" sz="1250" dirty="0">
                 <a:solidFill>
                   <a:srgbClr val="8FB3A0"/>
                 </a:solidFill>
@@ -17343,16 +17394,16 @@
                 <a:ea typeface="Courier New" pitchFamily="34" charset="-122"/>
                 <a:cs typeface="Courier New" pitchFamily="34" charset="-120"/>
               </a:rPr>
-              <a:t>/* build the tile map */</a:t>
-            </a:r>
-            <a:endParaRPr lang="en-US" sz="1100" dirty="0"/>
+              <a:t>/* build the</a:t>
+            </a:r>
+            <a:endParaRPr lang="en-US" sz="1250" dirty="0"/>
           </a:p>
           <a:p>
             <a:pPr indent="0" marL="0">
               <a:buNone/>
             </a:pPr>
             <a:r>
-              <a:rPr lang="en-US" sz="1100" dirty="0">
+              <a:rPr lang="en-US" sz="1250" dirty="0">
                 <a:solidFill>
                   <a:srgbClr val="E6EDF2"/>
                 </a:solidFill>
@@ -17360,16 +17411,16 @@
                 <a:ea typeface="Courier New" pitchFamily="34" charset="-122"/>
                 <a:cs typeface="Courier New" pitchFamily="34" charset="-120"/>
               </a:rPr>
-              <a:t>    prg32_platform_tile_flags(2, PRG32_TILE_FLAG_SOLID);</a:t>
-            </a:r>
-            <a:endParaRPr lang="en-US" sz="1100" dirty="0"/>
+              <a:t>        tile map */</a:t>
+            </a:r>
+            <a:endParaRPr lang="en-US" sz="1250" dirty="0"/>
           </a:p>
           <a:p>
             <a:pPr indent="0" marL="0">
               <a:buNone/>
             </a:pPr>
             <a:r>
-              <a:rPr lang="en-US" sz="1100" dirty="0">
+              <a:rPr lang="en-US" sz="1250" dirty="0">
                 <a:solidFill>
                   <a:srgbClr val="E6EDF2"/>
                 </a:solidFill>
@@ -17377,16 +17428,16 @@
                 <a:ea typeface="Courier New" pitchFamily="34" charset="-122"/>
                 <a:cs typeface="Courier New" pitchFamily="34" charset="-120"/>
               </a:rPr>
-              <a:t>    prg32_platform_actor_init(&amp;player, 1, 32, 120, 8, 8);</a:t>
-            </a:r>
-            <a:endParaRPr lang="en-US" sz="1100" dirty="0"/>
+              <a:t>    prg32_platform_tile_flags(2, PRG32_TILE_FLAG_SOLID);</a:t>
+            </a:r>
+            <a:endParaRPr lang="en-US" sz="1250" dirty="0"/>
           </a:p>
           <a:p>
             <a:pPr indent="0" marL="0">
               <a:buNone/>
             </a:pPr>
             <a:r>
-              <a:rPr lang="en-US" sz="1100" dirty="0">
+              <a:rPr lang="en-US" sz="1250" dirty="0">
                 <a:solidFill>
                   <a:srgbClr val="E6EDF2"/>
                 </a:solidFill>
@@ -17394,16 +17445,16 @@
                 <a:ea typeface="Courier New" pitchFamily="34" charset="-122"/>
                 <a:cs typeface="Courier New" pitchFamily="34" charset="-120"/>
               </a:rPr>
-              <a:t>}</a:t>
-            </a:r>
-            <a:endParaRPr lang="en-US" sz="1100" dirty="0"/>
+              <a:t>    prg32_platform_actor_init(&amp;player, 1, 32, 120, 8, 8);</a:t>
+            </a:r>
+            <a:endParaRPr lang="en-US" sz="1250" dirty="0"/>
           </a:p>
           <a:p>
             <a:pPr indent="0" marL="0">
               <a:buNone/>
             </a:pPr>
             <a:r>
-              <a:rPr lang="en-US" sz="1100" dirty="0">
+              <a:rPr lang="en-US" sz="1250" dirty="0">
                 <a:solidFill>
                   <a:srgbClr val="E6EDF2"/>
                 </a:solidFill>
@@ -17411,16 +17462,16 @@
                 <a:ea typeface="Courier New" pitchFamily="34" charset="-122"/>
                 <a:cs typeface="Courier New" pitchFamily="34" charset="-120"/>
               </a:rPr>
-              <a:t> </a:t>
-            </a:r>
-            <a:endParaRPr lang="en-US" sz="1100" dirty="0"/>
+              <a:t>}</a:t>
+            </a:r>
+            <a:endParaRPr lang="en-US" sz="1250" dirty="0"/>
           </a:p>
           <a:p>
             <a:pPr indent="0" marL="0">
               <a:buNone/>
             </a:pPr>
             <a:r>
-              <a:rPr lang="en-US" sz="1100" dirty="0">
+              <a:rPr lang="en-US" sz="1250" dirty="0">
                 <a:solidFill>
                   <a:srgbClr val="E6EDF2"/>
                 </a:solidFill>
@@ -17428,16 +17479,16 @@
                 <a:ea typeface="Courier New" pitchFamily="34" charset="-122"/>
                 <a:cs typeface="Courier New" pitchFamily="34" charset="-120"/>
               </a:rPr>
-              <a:t>void platformer_c_update(void) {</a:t>
-            </a:r>
-            <a:endParaRPr lang="en-US" sz="1100" dirty="0"/>
+              <a:t> </a:t>
+            </a:r>
+            <a:endParaRPr lang="en-US" sz="1250" dirty="0"/>
           </a:p>
           <a:p>
             <a:pPr indent="0" marL="0">
               <a:buNone/>
             </a:pPr>
             <a:r>
-              <a:rPr lang="en-US" sz="1100" dirty="0">
+              <a:rPr lang="en-US" sz="1250" dirty="0">
                 <a:solidFill>
                   <a:srgbClr val="E6EDF2"/>
                 </a:solidFill>
@@ -17445,16 +17496,16 @@
                 <a:ea typeface="Courier New" pitchFamily="34" charset="-122"/>
                 <a:cs typeface="Courier New" pitchFamily="34" charset="-120"/>
               </a:rPr>
-              <a:t>    uint32_t input = prg32_input_read();</a:t>
-            </a:r>
-            <a:endParaRPr lang="en-US" sz="1100" dirty="0"/>
+              <a:t>void platformer_c_update(void) {</a:t>
+            </a:r>
+            <a:endParaRPr lang="en-US" sz="1250" dirty="0"/>
           </a:p>
           <a:p>
             <a:pPr indent="0" marL="0">
               <a:buNone/>
             </a:pPr>
             <a:r>
-              <a:rPr lang="en-US" sz="1100" dirty="0">
+              <a:rPr lang="en-US" sz="1250" dirty="0">
                 <a:solidFill>
                   <a:srgbClr val="E6EDF2"/>
                 </a:solidFill>
@@ -17462,47 +17513,47 @@
                 <a:ea typeface="Courier New" pitchFamily="34" charset="-122"/>
                 <a:cs typeface="Courier New" pitchFamily="34" charset="-120"/>
               </a:rPr>
-              <a:t>    </a:t>
-            </a:r>
+              <a:t>    uint32_t input = prg32_input_read();</a:t>
+            </a:r>
+            <a:endParaRPr lang="en-US" sz="1250" dirty="0"/>
+          </a:p>
+          <a:p>
             <a:pPr indent="0" marL="0">
               <a:buNone/>
             </a:pPr>
             <a:r>
-              <a:rPr lang="en-US" sz="1100" dirty="0">
-                <a:solidFill>
-                  <a:srgbClr val="8FB3A0"/>
+              <a:rPr lang="en-US" sz="1250" dirty="0">
+                <a:solidFill>
+                  <a:srgbClr val="E6EDF2"/>
                 </a:solidFill>
                 <a:latin typeface="Courier New" pitchFamily="34" charset="0"/>
                 <a:ea typeface="Courier New" pitchFamily="34" charset="-122"/>
                 <a:cs typeface="Courier New" pitchFamily="34" charset="-120"/>
               </a:rPr>
-              <a:t>/* move_speed, jump_speed, gravity, max_fall */</a:t>
-            </a:r>
-            <a:endParaRPr lang="en-US" sz="1100" dirty="0"/>
-          </a:p>
-          <a:p>
+              <a:t>    </a:t>
+            </a:r>
             <a:pPr indent="0" marL="0">
               <a:buNone/>
             </a:pPr>
             <a:r>
-              <a:rPr lang="en-US" sz="1100" dirty="0">
-                <a:solidFill>
-                  <a:srgbClr val="E6EDF2"/>
+              <a:rPr lang="en-US" sz="1250" dirty="0">
+                <a:solidFill>
+                  <a:srgbClr val="8FB3A0"/>
                 </a:solidFill>
                 <a:latin typeface="Courier New" pitchFamily="34" charset="0"/>
                 <a:ea typeface="Courier New" pitchFamily="34" charset="-122"/>
                 <a:cs typeface="Courier New" pitchFamily="34" charset="-120"/>
               </a:rPr>
-              <a:t>    uint16_t state = prg32_platform_actor_step(&amp;player, input, 2, -7, 1, 5);</a:t>
-            </a:r>
-            <a:endParaRPr lang="en-US" sz="1100" dirty="0"/>
+              <a:t>/* move_speed, jump_speed, gravity, max_fall */</a:t>
+            </a:r>
+            <a:endParaRPr lang="en-US" sz="1250" dirty="0"/>
           </a:p>
           <a:p>
             <a:pPr indent="0" marL="0">
               <a:buNone/>
             </a:pPr>
             <a:r>
-              <a:rPr lang="en-US" sz="1100" dirty="0">
+              <a:rPr lang="en-US" sz="1250" dirty="0">
                 <a:solidFill>
                   <a:srgbClr val="E6EDF2"/>
                 </a:solidFill>
@@ -17510,16 +17561,16 @@
                 <a:ea typeface="Courier New" pitchFamily="34" charset="-122"/>
                 <a:cs typeface="Courier New" pitchFamily="34" charset="-120"/>
               </a:rPr>
-              <a:t>    if (state &amp; PRG32_PLATFORM_HAZARD) {</a:t>
-            </a:r>
-            <a:endParaRPr lang="en-US" sz="1100" dirty="0"/>
+              <a:t>    uint16_t state = prg32_platform_actor_step(&amp;player, input, 2,</a:t>
+            </a:r>
+            <a:endParaRPr lang="en-US" sz="1250" dirty="0"/>
           </a:p>
           <a:p>
             <a:pPr indent="0" marL="0">
               <a:buNone/>
             </a:pPr>
             <a:r>
-              <a:rPr lang="en-US" sz="1100" dirty="0">
+              <a:rPr lang="en-US" sz="1250" dirty="0">
                 <a:solidFill>
                   <a:srgbClr val="E6EDF2"/>
                 </a:solidFill>
@@ -17527,30 +17578,33 @@
                 <a:ea typeface="Courier New" pitchFamily="34" charset="-122"/>
                 <a:cs typeface="Courier New" pitchFamily="34" charset="-120"/>
               </a:rPr>
-              <a:t>        prg32_buzzer_tone(120, 60, 512);                   </a:t>
-            </a:r>
+              <a:t>        -7, 1, 5);</a:t>
+            </a:r>
+            <a:endParaRPr lang="en-US" sz="1250" dirty="0"/>
+          </a:p>
+          <a:p>
             <a:pPr indent="0" marL="0">
               <a:buNone/>
             </a:pPr>
             <a:r>
-              <a:rPr lang="en-US" sz="1100" dirty="0">
-                <a:solidFill>
-                  <a:srgbClr val="8FB3A0"/>
+              <a:rPr lang="en-US" sz="1250" dirty="0">
+                <a:solidFill>
+                  <a:srgbClr val="E6EDF2"/>
                 </a:solidFill>
                 <a:latin typeface="Courier New" pitchFamily="34" charset="0"/>
                 <a:ea typeface="Courier New" pitchFamily="34" charset="-122"/>
                 <a:cs typeface="Courier New" pitchFamily="34" charset="-120"/>
               </a:rPr>
-              <a:t>/* hit a hazard */</a:t>
-            </a:r>
-            <a:endParaRPr lang="en-US" sz="1100" dirty="0"/>
+              <a:t>    if (state &amp; PRG32_PLATFORM_HAZARD) {</a:t>
+            </a:r>
+            <a:endParaRPr lang="en-US" sz="1250" dirty="0"/>
           </a:p>
           <a:p>
             <a:pPr indent="0" marL="0">
               <a:buNone/>
             </a:pPr>
             <a:r>
-              <a:rPr lang="en-US" sz="1100" dirty="0">
+              <a:rPr lang="en-US" sz="1250" dirty="0">
                 <a:solidFill>
                   <a:srgbClr val="E6EDF2"/>
                 </a:solidFill>
@@ -17558,47 +17612,47 @@
                 <a:ea typeface="Courier New" pitchFamily="34" charset="-122"/>
                 <a:cs typeface="Courier New" pitchFamily="34" charset="-120"/>
               </a:rPr>
-              <a:t>    }</a:t>
-            </a:r>
-            <a:endParaRPr lang="en-US" sz="1100" dirty="0"/>
-          </a:p>
-          <a:p>
+              <a:t>        prg32_buzzer_tone(120, 60, 512);                   </a:t>
+            </a:r>
             <a:pPr indent="0" marL="0">
               <a:buNone/>
             </a:pPr>
             <a:r>
-              <a:rPr lang="en-US" sz="1100" dirty="0">
-                <a:solidFill>
-                  <a:srgbClr val="E6EDF2"/>
+              <a:rPr lang="en-US" sz="1250" dirty="0">
+                <a:solidFill>
+                  <a:srgbClr val="8FB3A0"/>
                 </a:solidFill>
                 <a:latin typeface="Courier New" pitchFamily="34" charset="0"/>
                 <a:ea typeface="Courier New" pitchFamily="34" charset="-122"/>
                 <a:cs typeface="Courier New" pitchFamily="34" charset="-120"/>
               </a:rPr>
-              <a:t>    prg32_platform_camera_follow(&amp;player, 64, 48);   </a:t>
-            </a:r>
+              <a:t>/* hit a</a:t>
+            </a:r>
+            <a:endParaRPr lang="en-US" sz="1250" dirty="0"/>
+          </a:p>
+          <a:p>
             <a:pPr indent="0" marL="0">
               <a:buNone/>
             </a:pPr>
             <a:r>
-              <a:rPr lang="en-US" sz="1100" dirty="0">
-                <a:solidFill>
-                  <a:srgbClr val="8FB3A0"/>
+              <a:rPr lang="en-US" sz="1250" dirty="0">
+                <a:solidFill>
+                  <a:srgbClr val="E6EDF2"/>
                 </a:solidFill>
                 <a:latin typeface="Courier New" pitchFamily="34" charset="0"/>
                 <a:ea typeface="Courier New" pitchFamily="34" charset="-122"/>
                 <a:cs typeface="Courier New" pitchFamily="34" charset="-120"/>
               </a:rPr>
-              <a:t>/* scroll the world */</a:t>
-            </a:r>
-            <a:endParaRPr lang="en-US" sz="1100" dirty="0"/>
+              <a:t>            hazard */</a:t>
+            </a:r>
+            <a:endParaRPr lang="en-US" sz="1250" dirty="0"/>
           </a:p>
           <a:p>
             <a:pPr indent="0" marL="0">
               <a:buNone/>
             </a:pPr>
             <a:r>
-              <a:rPr lang="en-US" sz="1100" dirty="0">
+              <a:rPr lang="en-US" sz="1250" dirty="0">
                 <a:solidFill>
                   <a:srgbClr val="E6EDF2"/>
                 </a:solidFill>
@@ -17606,9 +17660,74 @@
                 <a:ea typeface="Courier New" pitchFamily="34" charset="-122"/>
                 <a:cs typeface="Courier New" pitchFamily="34" charset="-120"/>
               </a:rPr>
+              <a:t>    }</a:t>
+            </a:r>
+            <a:endParaRPr lang="en-US" sz="1250" dirty="0"/>
+          </a:p>
+          <a:p>
+            <a:pPr indent="0" marL="0">
+              <a:buNone/>
+            </a:pPr>
+            <a:r>
+              <a:rPr lang="en-US" sz="1250" dirty="0">
+                <a:solidFill>
+                  <a:srgbClr val="E6EDF2"/>
+                </a:solidFill>
+                <a:latin typeface="Courier New" pitchFamily="34" charset="0"/>
+                <a:ea typeface="Courier New" pitchFamily="34" charset="-122"/>
+                <a:cs typeface="Courier New" pitchFamily="34" charset="-120"/>
+              </a:rPr>
+              <a:t>    prg32_platform_camera_follow(&amp;player, 64, 48);   </a:t>
+            </a:r>
+            <a:pPr indent="0" marL="0">
+              <a:buNone/>
+            </a:pPr>
+            <a:r>
+              <a:rPr lang="en-US" sz="1250" dirty="0">
+                <a:solidFill>
+                  <a:srgbClr val="8FB3A0"/>
+                </a:solidFill>
+                <a:latin typeface="Courier New" pitchFamily="34" charset="0"/>
+                <a:ea typeface="Courier New" pitchFamily="34" charset="-122"/>
+                <a:cs typeface="Courier New" pitchFamily="34" charset="-120"/>
+              </a:rPr>
+              <a:t>/* scroll the</a:t>
+            </a:r>
+            <a:endParaRPr lang="en-US" sz="1250" dirty="0"/>
+          </a:p>
+          <a:p>
+            <a:pPr indent="0" marL="0">
+              <a:buNone/>
+            </a:pPr>
+            <a:r>
+              <a:rPr lang="en-US" sz="1250" dirty="0">
+                <a:solidFill>
+                  <a:srgbClr val="E6EDF2"/>
+                </a:solidFill>
+                <a:latin typeface="Courier New" pitchFamily="34" charset="0"/>
+                <a:ea typeface="Courier New" pitchFamily="34" charset="-122"/>
+                <a:cs typeface="Courier New" pitchFamily="34" charset="-120"/>
+              </a:rPr>
+              <a:t>        world */</a:t>
+            </a:r>
+            <a:endParaRPr lang="en-US" sz="1250" dirty="0"/>
+          </a:p>
+          <a:p>
+            <a:pPr indent="0" marL="0">
+              <a:buNone/>
+            </a:pPr>
+            <a:r>
+              <a:rPr lang="en-US" sz="1250" dirty="0">
+                <a:solidFill>
+                  <a:srgbClr val="E6EDF2"/>
+                </a:solidFill>
+                <a:latin typeface="Courier New" pitchFamily="34" charset="0"/>
+                <a:ea typeface="Courier New" pitchFamily="34" charset="-122"/>
+                <a:cs typeface="Courier New" pitchFamily="34" charset="-120"/>
+              </a:rPr>
               <a:t>}</a:t>
             </a:r>
-            <a:endParaRPr lang="en-US" sz="1100" dirty="0"/>
+            <a:endParaRPr lang="en-US" sz="1250" dirty="0"/>
           </a:p>
         </p:txBody>
       </p:sp>
@@ -21897,7 +22016,7 @@
               <a:buNone/>
             </a:pPr>
             <a:r>
-              <a:rPr lang="en-US" sz="1150" dirty="0">
+              <a:rPr lang="en-US" sz="1350" dirty="0">
                 <a:solidFill>
                   <a:srgbClr val="E6EDF2"/>
                 </a:solidFill>
@@ -21911,7 +22030,7 @@
               <a:buNone/>
             </a:pPr>
             <a:r>
-              <a:rPr lang="en-US" sz="1150" dirty="0">
+              <a:rPr lang="en-US" sz="1350" dirty="0">
                 <a:solidFill>
                   <a:srgbClr val="8FB3A0"/>
                 </a:solidFill>
@@ -21919,16 +22038,16 @@
                 <a:ea typeface="Courier New" pitchFamily="34" charset="-122"/>
                 <a:cs typeface="Courier New" pitchFamily="34" charset="-120"/>
               </a:rPr>
-              <a:t>/* bricks[i] == 1 means brick i is intact */</a:t>
-            </a:r>
-            <a:endParaRPr lang="en-US" sz="1150" dirty="0"/>
+              <a:t>/* bricks[i] == 1 means brick i is</a:t>
+            </a:r>
+            <a:endParaRPr lang="en-US" sz="1350" dirty="0"/>
           </a:p>
           <a:p>
             <a:pPr indent="0" marL="0">
               <a:buNone/>
             </a:pPr>
             <a:r>
-              <a:rPr lang="en-US" sz="1150" dirty="0">
+              <a:rPr lang="en-US" sz="1350" dirty="0">
                 <a:solidFill>
                   <a:srgbClr val="E6EDF2"/>
                 </a:solidFill>
@@ -21936,16 +22055,16 @@
                 <a:ea typeface="Courier New" pitchFamily="34" charset="-122"/>
                 <a:cs typeface="Courier New" pitchFamily="34" charset="-120"/>
               </a:rPr>
-              <a:t> </a:t>
-            </a:r>
-            <a:endParaRPr lang="en-US" sz="1150" dirty="0"/>
+              <a:t>    intact */</a:t>
+            </a:r>
+            <a:endParaRPr lang="en-US" sz="1350" dirty="0"/>
           </a:p>
           <a:p>
             <a:pPr indent="0" marL="0">
               <a:buNone/>
             </a:pPr>
             <a:r>
-              <a:rPr lang="en-US" sz="1150" dirty="0">
+              <a:rPr lang="en-US" sz="1350" dirty="0">
                 <a:solidFill>
                   <a:srgbClr val="E6EDF2"/>
                 </a:solidFill>
@@ -21953,16 +22072,16 @@
                 <a:ea typeface="Courier New" pitchFamily="34" charset="-122"/>
                 <a:cs typeface="Courier New" pitchFamily="34" charset="-120"/>
               </a:rPr>
-              <a:t>static void reset_bricks(void) {</a:t>
-            </a:r>
-            <a:endParaRPr lang="en-US" sz="1150" dirty="0"/>
+              <a:t> </a:t>
+            </a:r>
+            <a:endParaRPr lang="en-US" sz="1350" dirty="0"/>
           </a:p>
           <a:p>
             <a:pPr indent="0" marL="0">
               <a:buNone/>
             </a:pPr>
             <a:r>
-              <a:rPr lang="en-US" sz="1150" dirty="0">
+              <a:rPr lang="en-US" sz="1350" dirty="0">
                 <a:solidFill>
                   <a:srgbClr val="E6EDF2"/>
                 </a:solidFill>
@@ -21970,16 +22089,16 @@
                 <a:ea typeface="Courier New" pitchFamily="34" charset="-122"/>
                 <a:cs typeface="Courier New" pitchFamily="34" charset="-120"/>
               </a:rPr>
-              <a:t>    for (int i = 0; i &lt; 10; ++i) {</a:t>
-            </a:r>
-            <a:endParaRPr lang="en-US" sz="1150" dirty="0"/>
+              <a:t>static void reset_bricks(void) {</a:t>
+            </a:r>
+            <a:endParaRPr lang="en-US" sz="1350" dirty="0"/>
           </a:p>
           <a:p>
             <a:pPr indent="0" marL="0">
               <a:buNone/>
             </a:pPr>
             <a:r>
-              <a:rPr lang="en-US" sz="1150" dirty="0">
+              <a:rPr lang="en-US" sz="1350" dirty="0">
                 <a:solidFill>
                   <a:srgbClr val="E6EDF2"/>
                 </a:solidFill>
@@ -21987,47 +22106,47 @@
                 <a:ea typeface="Courier New" pitchFamily="34" charset="-122"/>
                 <a:cs typeface="Courier New" pitchFamily="34" charset="-120"/>
               </a:rPr>
-              <a:t>        bricks[i] = 1;       </a:t>
-            </a:r>
+              <a:t>    for (int i = 0; i &lt; 10; ++i) {</a:t>
+            </a:r>
+            <a:endParaRPr lang="en-US" sz="1350" dirty="0"/>
+          </a:p>
+          <a:p>
             <a:pPr indent="0" marL="0">
               <a:buNone/>
             </a:pPr>
             <a:r>
-              <a:rPr lang="en-US" sz="1150" dirty="0">
-                <a:solidFill>
-                  <a:srgbClr val="8FB3A0"/>
+              <a:rPr lang="en-US" sz="1350" dirty="0">
+                <a:solidFill>
+                  <a:srgbClr val="E6EDF2"/>
                 </a:solidFill>
                 <a:latin typeface="Courier New" pitchFamily="34" charset="0"/>
                 <a:ea typeface="Courier New" pitchFamily="34" charset="-122"/>
                 <a:cs typeface="Courier New" pitchFamily="34" charset="-120"/>
               </a:rPr>
-              <a:t>/* every brick starts present */</a:t>
-            </a:r>
-            <a:endParaRPr lang="en-US" sz="1150" dirty="0"/>
-          </a:p>
-          <a:p>
+              <a:t>        bricks[i] = 1;       </a:t>
+            </a:r>
             <a:pPr indent="0" marL="0">
               <a:buNone/>
             </a:pPr>
             <a:r>
-              <a:rPr lang="en-US" sz="1150" dirty="0">
-                <a:solidFill>
-                  <a:srgbClr val="E6EDF2"/>
+              <a:rPr lang="en-US" sz="1350" dirty="0">
+                <a:solidFill>
+                  <a:srgbClr val="8FB3A0"/>
                 </a:solidFill>
                 <a:latin typeface="Courier New" pitchFamily="34" charset="0"/>
                 <a:ea typeface="Courier New" pitchFamily="34" charset="-122"/>
                 <a:cs typeface="Courier New" pitchFamily="34" charset="-120"/>
               </a:rPr>
-              <a:t>    }</a:t>
-            </a:r>
-            <a:endParaRPr lang="en-US" sz="1150" dirty="0"/>
+              <a:t>/* every brick starts present */</a:t>
+            </a:r>
+            <a:endParaRPr lang="en-US" sz="1350" dirty="0"/>
           </a:p>
           <a:p>
             <a:pPr indent="0" marL="0">
               <a:buNone/>
             </a:pPr>
             <a:r>
-              <a:rPr lang="en-US" sz="1150" dirty="0">
+              <a:rPr lang="en-US" sz="1350" dirty="0">
                 <a:solidFill>
                   <a:srgbClr val="E6EDF2"/>
                 </a:solidFill>
@@ -22035,9 +22154,26 @@
                 <a:ea typeface="Courier New" pitchFamily="34" charset="-122"/>
                 <a:cs typeface="Courier New" pitchFamily="34" charset="-120"/>
               </a:rPr>
+              <a:t>    }</a:t>
+            </a:r>
+            <a:endParaRPr lang="en-US" sz="1350" dirty="0"/>
+          </a:p>
+          <a:p>
+            <a:pPr indent="0" marL="0">
+              <a:buNone/>
+            </a:pPr>
+            <a:r>
+              <a:rPr lang="en-US" sz="1350" dirty="0">
+                <a:solidFill>
+                  <a:srgbClr val="E6EDF2"/>
+                </a:solidFill>
+                <a:latin typeface="Courier New" pitchFamily="34" charset="0"/>
+                <a:ea typeface="Courier New" pitchFamily="34" charset="-122"/>
+                <a:cs typeface="Courier New" pitchFamily="34" charset="-120"/>
+              </a:rPr>
               <a:t>}</a:t>
             </a:r>
-            <a:endParaRPr lang="en-US" sz="1150" dirty="0"/>
+            <a:endParaRPr lang="en-US" sz="1350" dirty="0"/>
           </a:p>
         </p:txBody>
       </p:sp>
